--- a/Multi_Sub_Agent_USE_Manual.pptx
+++ b/Multi_Sub_Agent_USE_Manual.pptx
@@ -5,7 +5,7 @@
     <p:sldMasterId id="2147483649" r:id="rId1"/>
   </p:sldMasterIdLst>
   <p:notesMasterIdLst>
-    <p:notesMasterId r:id="rId43"/>
+    <p:notesMasterId r:id="rId49"/>
   </p:notesMasterIdLst>
   <p:sldIdLst>
     <p:sldId id="256" r:id="rId2"/>
@@ -49,6 +49,12 @@
     <p:sldId id="294" r:id="rId40"/>
     <p:sldId id="301" r:id="rId41"/>
     <p:sldId id="326" r:id="rId42"/>
+    <p:sldId id="327" r:id="rId43"/>
+    <p:sldId id="328" r:id="rId44"/>
+    <p:sldId id="329" r:id="rId45"/>
+    <p:sldId id="330" r:id="rId46"/>
+    <p:sldId id="331" r:id="rId47"/>
+    <p:sldId id="332" r:id="rId48"/>
   </p:sldIdLst>
   <p:sldSz cx="12192000" cy="6858000"/>
   <p:notesSz cx="6858000" cy="12192000"/>
@@ -5438,6 +5444,654 @@
     <p:extLst>
       <p:ext uri="{BB962C8B-B14F-4D97-AF65-F5344CB8AC3E}">
         <p14:creationId xmlns:p14="http://schemas.microsoft.com/office/powerpoint/2010/main" val="2335424430"/>
+      </p:ext>
+    </p:extLst>
+  </p:cSld>
+  <p:clrMapOvr>
+    <a:masterClrMapping/>
+  </p:clrMapOvr>
+</p:notes>
+</file>
+
+<file path=ppt/notesSlides/notesSlide42.xml><?xml version="1.0" encoding="utf-8"?>
+<p:notes xmlns:a="http://schemas.openxmlformats.org/drawingml/2006/main" xmlns:r="http://schemas.openxmlformats.org/officeDocument/2006/relationships" xmlns:p="http://schemas.openxmlformats.org/presentationml/2006/main">
+  <p:cSld>
+    <p:spTree>
+      <p:nvGrpSpPr>
+        <p:cNvPr id="1" name="">
+          <a:extLst>
+            <a:ext uri="{FF2B5EF4-FFF2-40B4-BE49-F238E27FC236}">
+              <a16:creationId xmlns:a16="http://schemas.microsoft.com/office/drawing/2014/main" id="{64A3A93D-AC63-770D-3FD0-67324B732033}"/>
+            </a:ext>
+          </a:extLst>
+        </p:cNvPr>
+        <p:cNvGrpSpPr/>
+        <p:nvPr/>
+      </p:nvGrpSpPr>
+      <p:grpSpPr>
+        <a:xfrm>
+          <a:off x="0" y="0"/>
+          <a:ext cx="0" cy="0"/>
+          <a:chOff x="0" y="0"/>
+          <a:chExt cx="0" cy="0"/>
+        </a:xfrm>
+      </p:grpSpPr>
+      <p:sp>
+        <p:nvSpPr>
+          <p:cNvPr id="2" name="Slide Image Placeholder 1">
+            <a:extLst>
+              <a:ext uri="{FF2B5EF4-FFF2-40B4-BE49-F238E27FC236}">
+                <a16:creationId xmlns:a16="http://schemas.microsoft.com/office/drawing/2014/main" id="{8E36EA31-DDE8-F65A-4D84-FFEBD8B0C686}"/>
+              </a:ext>
+            </a:extLst>
+          </p:cNvPr>
+          <p:cNvSpPr>
+            <a:spLocks noGrp="1" noRot="1" noChangeAspect="1"/>
+          </p:cNvSpPr>
+          <p:nvPr>
+            <p:ph type="sldImg"/>
+          </p:nvPr>
+        </p:nvSpPr>
+        <p:spPr/>
+      </p:sp>
+      <p:sp>
+        <p:nvSpPr>
+          <p:cNvPr id="3" name="Notes Placeholder 2">
+            <a:extLst>
+              <a:ext uri="{FF2B5EF4-FFF2-40B4-BE49-F238E27FC236}">
+                <a16:creationId xmlns:a16="http://schemas.microsoft.com/office/drawing/2014/main" id="{7690D024-2D4F-0692-F95B-064ECBDAD036}"/>
+              </a:ext>
+            </a:extLst>
+          </p:cNvPr>
+          <p:cNvSpPr>
+            <a:spLocks noGrp="1"/>
+          </p:cNvSpPr>
+          <p:nvPr>
+            <p:ph type="body" idx="1"/>
+          </p:nvPr>
+        </p:nvSpPr>
+        <p:spPr/>
+        <p:txBody>
+          <a:bodyPr/>
+          <a:lstStyle/>
+          <a:p>
+            <a:endParaRPr lang="en-US" dirty="0"/>
+          </a:p>
+        </p:txBody>
+      </p:sp>
+      <p:sp>
+        <p:nvSpPr>
+          <p:cNvPr id="4" name="Slide Number Placeholder 3">
+            <a:extLst>
+              <a:ext uri="{FF2B5EF4-FFF2-40B4-BE49-F238E27FC236}">
+                <a16:creationId xmlns:a16="http://schemas.microsoft.com/office/drawing/2014/main" id="{740C114B-B2E3-B92E-97D8-892B9FD5A68C}"/>
+              </a:ext>
+            </a:extLst>
+          </p:cNvPr>
+          <p:cNvSpPr>
+            <a:spLocks noGrp="1"/>
+          </p:cNvSpPr>
+          <p:nvPr>
+            <p:ph type="sldNum" sz="quarter" idx="10"/>
+          </p:nvPr>
+        </p:nvSpPr>
+        <p:spPr/>
+        <p:txBody>
+          <a:bodyPr/>
+          <a:lstStyle/>
+          <a:p>
+            <a:fld id="{F7021451-1387-4CA6-816F-3879F97B5CBC}" type="slidenum">
+              <a:rPr lang="en-US"/>
+              <a:t>42</a:t>
+            </a:fld>
+            <a:endParaRPr lang="en-US"/>
+          </a:p>
+        </p:txBody>
+      </p:sp>
+    </p:spTree>
+    <p:extLst>
+      <p:ext uri="{BB962C8B-B14F-4D97-AF65-F5344CB8AC3E}">
+        <p14:creationId xmlns:p14="http://schemas.microsoft.com/office/powerpoint/2010/main" val="3374465633"/>
+      </p:ext>
+    </p:extLst>
+  </p:cSld>
+  <p:clrMapOvr>
+    <a:masterClrMapping/>
+  </p:clrMapOvr>
+</p:notes>
+</file>
+
+<file path=ppt/notesSlides/notesSlide43.xml><?xml version="1.0" encoding="utf-8"?>
+<p:notes xmlns:a="http://schemas.openxmlformats.org/drawingml/2006/main" xmlns:r="http://schemas.openxmlformats.org/officeDocument/2006/relationships" xmlns:p="http://schemas.openxmlformats.org/presentationml/2006/main">
+  <p:cSld>
+    <p:spTree>
+      <p:nvGrpSpPr>
+        <p:cNvPr id="1" name="">
+          <a:extLst>
+            <a:ext uri="{FF2B5EF4-FFF2-40B4-BE49-F238E27FC236}">
+              <a16:creationId xmlns:a16="http://schemas.microsoft.com/office/drawing/2014/main" id="{6BAC5C56-FC34-AE59-9E0E-B771C334D605}"/>
+            </a:ext>
+          </a:extLst>
+        </p:cNvPr>
+        <p:cNvGrpSpPr/>
+        <p:nvPr/>
+      </p:nvGrpSpPr>
+      <p:grpSpPr>
+        <a:xfrm>
+          <a:off x="0" y="0"/>
+          <a:ext cx="0" cy="0"/>
+          <a:chOff x="0" y="0"/>
+          <a:chExt cx="0" cy="0"/>
+        </a:xfrm>
+      </p:grpSpPr>
+      <p:sp>
+        <p:nvSpPr>
+          <p:cNvPr id="2" name="Slide Image Placeholder 1">
+            <a:extLst>
+              <a:ext uri="{FF2B5EF4-FFF2-40B4-BE49-F238E27FC236}">
+                <a16:creationId xmlns:a16="http://schemas.microsoft.com/office/drawing/2014/main" id="{29831D14-B388-AD43-4D28-43802AC3203C}"/>
+              </a:ext>
+            </a:extLst>
+          </p:cNvPr>
+          <p:cNvSpPr>
+            <a:spLocks noGrp="1" noRot="1" noChangeAspect="1"/>
+          </p:cNvSpPr>
+          <p:nvPr>
+            <p:ph type="sldImg"/>
+          </p:nvPr>
+        </p:nvSpPr>
+        <p:spPr/>
+      </p:sp>
+      <p:sp>
+        <p:nvSpPr>
+          <p:cNvPr id="3" name="Notes Placeholder 2">
+            <a:extLst>
+              <a:ext uri="{FF2B5EF4-FFF2-40B4-BE49-F238E27FC236}">
+                <a16:creationId xmlns:a16="http://schemas.microsoft.com/office/drawing/2014/main" id="{9B32BDA5-9FBB-594C-521F-AC6D60E7362F}"/>
+              </a:ext>
+            </a:extLst>
+          </p:cNvPr>
+          <p:cNvSpPr>
+            <a:spLocks noGrp="1"/>
+          </p:cNvSpPr>
+          <p:nvPr>
+            <p:ph type="body" idx="1"/>
+          </p:nvPr>
+        </p:nvSpPr>
+        <p:spPr/>
+        <p:txBody>
+          <a:bodyPr/>
+          <a:lstStyle/>
+          <a:p>
+            <a:endParaRPr lang="en-US" dirty="0"/>
+          </a:p>
+        </p:txBody>
+      </p:sp>
+      <p:sp>
+        <p:nvSpPr>
+          <p:cNvPr id="4" name="Slide Number Placeholder 3">
+            <a:extLst>
+              <a:ext uri="{FF2B5EF4-FFF2-40B4-BE49-F238E27FC236}">
+                <a16:creationId xmlns:a16="http://schemas.microsoft.com/office/drawing/2014/main" id="{99F3DF64-C569-78C6-A7E2-231F16A6D4FB}"/>
+              </a:ext>
+            </a:extLst>
+          </p:cNvPr>
+          <p:cNvSpPr>
+            <a:spLocks noGrp="1"/>
+          </p:cNvSpPr>
+          <p:nvPr>
+            <p:ph type="sldNum" sz="quarter" idx="10"/>
+          </p:nvPr>
+        </p:nvSpPr>
+        <p:spPr/>
+        <p:txBody>
+          <a:bodyPr/>
+          <a:lstStyle/>
+          <a:p>
+            <a:fld id="{F7021451-1387-4CA6-816F-3879F97B5CBC}" type="slidenum">
+              <a:rPr lang="en-US"/>
+              <a:t>43</a:t>
+            </a:fld>
+            <a:endParaRPr lang="en-US"/>
+          </a:p>
+        </p:txBody>
+      </p:sp>
+    </p:spTree>
+    <p:extLst>
+      <p:ext uri="{BB962C8B-B14F-4D97-AF65-F5344CB8AC3E}">
+        <p14:creationId xmlns:p14="http://schemas.microsoft.com/office/powerpoint/2010/main" val="4236419811"/>
+      </p:ext>
+    </p:extLst>
+  </p:cSld>
+  <p:clrMapOvr>
+    <a:masterClrMapping/>
+  </p:clrMapOvr>
+</p:notes>
+</file>
+
+<file path=ppt/notesSlides/notesSlide44.xml><?xml version="1.0" encoding="utf-8"?>
+<p:notes xmlns:a="http://schemas.openxmlformats.org/drawingml/2006/main" xmlns:r="http://schemas.openxmlformats.org/officeDocument/2006/relationships" xmlns:p="http://schemas.openxmlformats.org/presentationml/2006/main">
+  <p:cSld>
+    <p:spTree>
+      <p:nvGrpSpPr>
+        <p:cNvPr id="1" name="">
+          <a:extLst>
+            <a:ext uri="{FF2B5EF4-FFF2-40B4-BE49-F238E27FC236}">
+              <a16:creationId xmlns:a16="http://schemas.microsoft.com/office/drawing/2014/main" id="{4AC7ED6D-313B-2C88-A6B3-3853F9B0B2FA}"/>
+            </a:ext>
+          </a:extLst>
+        </p:cNvPr>
+        <p:cNvGrpSpPr/>
+        <p:nvPr/>
+      </p:nvGrpSpPr>
+      <p:grpSpPr>
+        <a:xfrm>
+          <a:off x="0" y="0"/>
+          <a:ext cx="0" cy="0"/>
+          <a:chOff x="0" y="0"/>
+          <a:chExt cx="0" cy="0"/>
+        </a:xfrm>
+      </p:grpSpPr>
+      <p:sp>
+        <p:nvSpPr>
+          <p:cNvPr id="2" name="Slide Image Placeholder 1">
+            <a:extLst>
+              <a:ext uri="{FF2B5EF4-FFF2-40B4-BE49-F238E27FC236}">
+                <a16:creationId xmlns:a16="http://schemas.microsoft.com/office/drawing/2014/main" id="{1C47A0F7-3E04-4C97-12C8-C2DB55651ED8}"/>
+              </a:ext>
+            </a:extLst>
+          </p:cNvPr>
+          <p:cNvSpPr>
+            <a:spLocks noGrp="1" noRot="1" noChangeAspect="1"/>
+          </p:cNvSpPr>
+          <p:nvPr>
+            <p:ph type="sldImg"/>
+          </p:nvPr>
+        </p:nvSpPr>
+        <p:spPr/>
+      </p:sp>
+      <p:sp>
+        <p:nvSpPr>
+          <p:cNvPr id="3" name="Notes Placeholder 2">
+            <a:extLst>
+              <a:ext uri="{FF2B5EF4-FFF2-40B4-BE49-F238E27FC236}">
+                <a16:creationId xmlns:a16="http://schemas.microsoft.com/office/drawing/2014/main" id="{F6BC74D7-795F-44B6-5558-234715B18F27}"/>
+              </a:ext>
+            </a:extLst>
+          </p:cNvPr>
+          <p:cNvSpPr>
+            <a:spLocks noGrp="1"/>
+          </p:cNvSpPr>
+          <p:nvPr>
+            <p:ph type="body" idx="1"/>
+          </p:nvPr>
+        </p:nvSpPr>
+        <p:spPr/>
+        <p:txBody>
+          <a:bodyPr/>
+          <a:lstStyle/>
+          <a:p>
+            <a:endParaRPr lang="en-US" dirty="0"/>
+          </a:p>
+        </p:txBody>
+      </p:sp>
+      <p:sp>
+        <p:nvSpPr>
+          <p:cNvPr id="4" name="Slide Number Placeholder 3">
+            <a:extLst>
+              <a:ext uri="{FF2B5EF4-FFF2-40B4-BE49-F238E27FC236}">
+                <a16:creationId xmlns:a16="http://schemas.microsoft.com/office/drawing/2014/main" id="{BFCA4EDC-26E7-1FD4-2DB0-F699EAB84729}"/>
+              </a:ext>
+            </a:extLst>
+          </p:cNvPr>
+          <p:cNvSpPr>
+            <a:spLocks noGrp="1"/>
+          </p:cNvSpPr>
+          <p:nvPr>
+            <p:ph type="sldNum" sz="quarter" idx="10"/>
+          </p:nvPr>
+        </p:nvSpPr>
+        <p:spPr/>
+        <p:txBody>
+          <a:bodyPr/>
+          <a:lstStyle/>
+          <a:p>
+            <a:fld id="{F7021451-1387-4CA6-816F-3879F97B5CBC}" type="slidenum">
+              <a:rPr lang="en-US"/>
+              <a:t>44</a:t>
+            </a:fld>
+            <a:endParaRPr lang="en-US"/>
+          </a:p>
+        </p:txBody>
+      </p:sp>
+    </p:spTree>
+    <p:extLst>
+      <p:ext uri="{BB962C8B-B14F-4D97-AF65-F5344CB8AC3E}">
+        <p14:creationId xmlns:p14="http://schemas.microsoft.com/office/powerpoint/2010/main" val="3941607895"/>
+      </p:ext>
+    </p:extLst>
+  </p:cSld>
+  <p:clrMapOvr>
+    <a:masterClrMapping/>
+  </p:clrMapOvr>
+</p:notes>
+</file>
+
+<file path=ppt/notesSlides/notesSlide45.xml><?xml version="1.0" encoding="utf-8"?>
+<p:notes xmlns:a="http://schemas.openxmlformats.org/drawingml/2006/main" xmlns:r="http://schemas.openxmlformats.org/officeDocument/2006/relationships" xmlns:p="http://schemas.openxmlformats.org/presentationml/2006/main">
+  <p:cSld>
+    <p:spTree>
+      <p:nvGrpSpPr>
+        <p:cNvPr id="1" name="">
+          <a:extLst>
+            <a:ext uri="{FF2B5EF4-FFF2-40B4-BE49-F238E27FC236}">
+              <a16:creationId xmlns:a16="http://schemas.microsoft.com/office/drawing/2014/main" id="{E5400975-7B66-72BB-D7CC-206A77E9A465}"/>
+            </a:ext>
+          </a:extLst>
+        </p:cNvPr>
+        <p:cNvGrpSpPr/>
+        <p:nvPr/>
+      </p:nvGrpSpPr>
+      <p:grpSpPr>
+        <a:xfrm>
+          <a:off x="0" y="0"/>
+          <a:ext cx="0" cy="0"/>
+          <a:chOff x="0" y="0"/>
+          <a:chExt cx="0" cy="0"/>
+        </a:xfrm>
+      </p:grpSpPr>
+      <p:sp>
+        <p:nvSpPr>
+          <p:cNvPr id="2" name="Slide Image Placeholder 1">
+            <a:extLst>
+              <a:ext uri="{FF2B5EF4-FFF2-40B4-BE49-F238E27FC236}">
+                <a16:creationId xmlns:a16="http://schemas.microsoft.com/office/drawing/2014/main" id="{7EBF7F9F-7592-AA3C-7CAF-6444B9175FBC}"/>
+              </a:ext>
+            </a:extLst>
+          </p:cNvPr>
+          <p:cNvSpPr>
+            <a:spLocks noGrp="1" noRot="1" noChangeAspect="1"/>
+          </p:cNvSpPr>
+          <p:nvPr>
+            <p:ph type="sldImg"/>
+          </p:nvPr>
+        </p:nvSpPr>
+        <p:spPr/>
+      </p:sp>
+      <p:sp>
+        <p:nvSpPr>
+          <p:cNvPr id="3" name="Notes Placeholder 2">
+            <a:extLst>
+              <a:ext uri="{FF2B5EF4-FFF2-40B4-BE49-F238E27FC236}">
+                <a16:creationId xmlns:a16="http://schemas.microsoft.com/office/drawing/2014/main" id="{A58D84FD-1DB5-CF63-8605-191FB8EF62ED}"/>
+              </a:ext>
+            </a:extLst>
+          </p:cNvPr>
+          <p:cNvSpPr>
+            <a:spLocks noGrp="1"/>
+          </p:cNvSpPr>
+          <p:nvPr>
+            <p:ph type="body" idx="1"/>
+          </p:nvPr>
+        </p:nvSpPr>
+        <p:spPr/>
+        <p:txBody>
+          <a:bodyPr/>
+          <a:lstStyle/>
+          <a:p>
+            <a:endParaRPr lang="en-US" dirty="0"/>
+          </a:p>
+        </p:txBody>
+      </p:sp>
+      <p:sp>
+        <p:nvSpPr>
+          <p:cNvPr id="4" name="Slide Number Placeholder 3">
+            <a:extLst>
+              <a:ext uri="{FF2B5EF4-FFF2-40B4-BE49-F238E27FC236}">
+                <a16:creationId xmlns:a16="http://schemas.microsoft.com/office/drawing/2014/main" id="{1618FDDF-3676-68C9-75E5-534D3EADF3B6}"/>
+              </a:ext>
+            </a:extLst>
+          </p:cNvPr>
+          <p:cNvSpPr>
+            <a:spLocks noGrp="1"/>
+          </p:cNvSpPr>
+          <p:nvPr>
+            <p:ph type="sldNum" sz="quarter" idx="10"/>
+          </p:nvPr>
+        </p:nvSpPr>
+        <p:spPr/>
+        <p:txBody>
+          <a:bodyPr/>
+          <a:lstStyle/>
+          <a:p>
+            <a:fld id="{F7021451-1387-4CA6-816F-3879F97B5CBC}" type="slidenum">
+              <a:rPr lang="en-US"/>
+              <a:t>45</a:t>
+            </a:fld>
+            <a:endParaRPr lang="en-US"/>
+          </a:p>
+        </p:txBody>
+      </p:sp>
+    </p:spTree>
+    <p:extLst>
+      <p:ext uri="{BB962C8B-B14F-4D97-AF65-F5344CB8AC3E}">
+        <p14:creationId xmlns:p14="http://schemas.microsoft.com/office/powerpoint/2010/main" val="4047758378"/>
+      </p:ext>
+    </p:extLst>
+  </p:cSld>
+  <p:clrMapOvr>
+    <a:masterClrMapping/>
+  </p:clrMapOvr>
+</p:notes>
+</file>
+
+<file path=ppt/notesSlides/notesSlide46.xml><?xml version="1.0" encoding="utf-8"?>
+<p:notes xmlns:a="http://schemas.openxmlformats.org/drawingml/2006/main" xmlns:r="http://schemas.openxmlformats.org/officeDocument/2006/relationships" xmlns:p="http://schemas.openxmlformats.org/presentationml/2006/main">
+  <p:cSld>
+    <p:spTree>
+      <p:nvGrpSpPr>
+        <p:cNvPr id="1" name="">
+          <a:extLst>
+            <a:ext uri="{FF2B5EF4-FFF2-40B4-BE49-F238E27FC236}">
+              <a16:creationId xmlns:a16="http://schemas.microsoft.com/office/drawing/2014/main" id="{5CEF570A-896F-4323-3845-14F0B6A4A55A}"/>
+            </a:ext>
+          </a:extLst>
+        </p:cNvPr>
+        <p:cNvGrpSpPr/>
+        <p:nvPr/>
+      </p:nvGrpSpPr>
+      <p:grpSpPr>
+        <a:xfrm>
+          <a:off x="0" y="0"/>
+          <a:ext cx="0" cy="0"/>
+          <a:chOff x="0" y="0"/>
+          <a:chExt cx="0" cy="0"/>
+        </a:xfrm>
+      </p:grpSpPr>
+      <p:sp>
+        <p:nvSpPr>
+          <p:cNvPr id="2" name="Slide Image Placeholder 1">
+            <a:extLst>
+              <a:ext uri="{FF2B5EF4-FFF2-40B4-BE49-F238E27FC236}">
+                <a16:creationId xmlns:a16="http://schemas.microsoft.com/office/drawing/2014/main" id="{B2E26B77-558A-6A55-111A-0939AC52F5A0}"/>
+              </a:ext>
+            </a:extLst>
+          </p:cNvPr>
+          <p:cNvSpPr>
+            <a:spLocks noGrp="1" noRot="1" noChangeAspect="1"/>
+          </p:cNvSpPr>
+          <p:nvPr>
+            <p:ph type="sldImg"/>
+          </p:nvPr>
+        </p:nvSpPr>
+        <p:spPr/>
+      </p:sp>
+      <p:sp>
+        <p:nvSpPr>
+          <p:cNvPr id="3" name="Notes Placeholder 2">
+            <a:extLst>
+              <a:ext uri="{FF2B5EF4-FFF2-40B4-BE49-F238E27FC236}">
+                <a16:creationId xmlns:a16="http://schemas.microsoft.com/office/drawing/2014/main" id="{89A72563-2894-F58D-87AF-630096B4DE11}"/>
+              </a:ext>
+            </a:extLst>
+          </p:cNvPr>
+          <p:cNvSpPr>
+            <a:spLocks noGrp="1"/>
+          </p:cNvSpPr>
+          <p:nvPr>
+            <p:ph type="body" idx="1"/>
+          </p:nvPr>
+        </p:nvSpPr>
+        <p:spPr/>
+        <p:txBody>
+          <a:bodyPr/>
+          <a:lstStyle/>
+          <a:p>
+            <a:endParaRPr lang="en-US" dirty="0"/>
+          </a:p>
+        </p:txBody>
+      </p:sp>
+      <p:sp>
+        <p:nvSpPr>
+          <p:cNvPr id="4" name="Slide Number Placeholder 3">
+            <a:extLst>
+              <a:ext uri="{FF2B5EF4-FFF2-40B4-BE49-F238E27FC236}">
+                <a16:creationId xmlns:a16="http://schemas.microsoft.com/office/drawing/2014/main" id="{18EAF013-93A3-5259-9812-717381E8F429}"/>
+              </a:ext>
+            </a:extLst>
+          </p:cNvPr>
+          <p:cNvSpPr>
+            <a:spLocks noGrp="1"/>
+          </p:cNvSpPr>
+          <p:nvPr>
+            <p:ph type="sldNum" sz="quarter" idx="10"/>
+          </p:nvPr>
+        </p:nvSpPr>
+        <p:spPr/>
+        <p:txBody>
+          <a:bodyPr/>
+          <a:lstStyle/>
+          <a:p>
+            <a:fld id="{F7021451-1387-4CA6-816F-3879F97B5CBC}" type="slidenum">
+              <a:rPr lang="en-US"/>
+              <a:t>46</a:t>
+            </a:fld>
+            <a:endParaRPr lang="en-US"/>
+          </a:p>
+        </p:txBody>
+      </p:sp>
+    </p:spTree>
+    <p:extLst>
+      <p:ext uri="{BB962C8B-B14F-4D97-AF65-F5344CB8AC3E}">
+        <p14:creationId xmlns:p14="http://schemas.microsoft.com/office/powerpoint/2010/main" val="2050246628"/>
+      </p:ext>
+    </p:extLst>
+  </p:cSld>
+  <p:clrMapOvr>
+    <a:masterClrMapping/>
+  </p:clrMapOvr>
+</p:notes>
+</file>
+
+<file path=ppt/notesSlides/notesSlide47.xml><?xml version="1.0" encoding="utf-8"?>
+<p:notes xmlns:a="http://schemas.openxmlformats.org/drawingml/2006/main" xmlns:r="http://schemas.openxmlformats.org/officeDocument/2006/relationships" xmlns:p="http://schemas.openxmlformats.org/presentationml/2006/main">
+  <p:cSld>
+    <p:spTree>
+      <p:nvGrpSpPr>
+        <p:cNvPr id="1" name="">
+          <a:extLst>
+            <a:ext uri="{FF2B5EF4-FFF2-40B4-BE49-F238E27FC236}">
+              <a16:creationId xmlns:a16="http://schemas.microsoft.com/office/drawing/2014/main" id="{D3F17B93-6434-5FAB-5B6A-E63504B90781}"/>
+            </a:ext>
+          </a:extLst>
+        </p:cNvPr>
+        <p:cNvGrpSpPr/>
+        <p:nvPr/>
+      </p:nvGrpSpPr>
+      <p:grpSpPr>
+        <a:xfrm>
+          <a:off x="0" y="0"/>
+          <a:ext cx="0" cy="0"/>
+          <a:chOff x="0" y="0"/>
+          <a:chExt cx="0" cy="0"/>
+        </a:xfrm>
+      </p:grpSpPr>
+      <p:sp>
+        <p:nvSpPr>
+          <p:cNvPr id="2" name="Slide Image Placeholder 1">
+            <a:extLst>
+              <a:ext uri="{FF2B5EF4-FFF2-40B4-BE49-F238E27FC236}">
+                <a16:creationId xmlns:a16="http://schemas.microsoft.com/office/drawing/2014/main" id="{837F48F5-B198-55F4-C0B6-B84083A99EFD}"/>
+              </a:ext>
+            </a:extLst>
+          </p:cNvPr>
+          <p:cNvSpPr>
+            <a:spLocks noGrp="1" noRot="1" noChangeAspect="1"/>
+          </p:cNvSpPr>
+          <p:nvPr>
+            <p:ph type="sldImg"/>
+          </p:nvPr>
+        </p:nvSpPr>
+        <p:spPr/>
+      </p:sp>
+      <p:sp>
+        <p:nvSpPr>
+          <p:cNvPr id="3" name="Notes Placeholder 2">
+            <a:extLst>
+              <a:ext uri="{FF2B5EF4-FFF2-40B4-BE49-F238E27FC236}">
+                <a16:creationId xmlns:a16="http://schemas.microsoft.com/office/drawing/2014/main" id="{6FEC4718-084A-A456-5C50-B3B7476A393F}"/>
+              </a:ext>
+            </a:extLst>
+          </p:cNvPr>
+          <p:cNvSpPr>
+            <a:spLocks noGrp="1"/>
+          </p:cNvSpPr>
+          <p:nvPr>
+            <p:ph type="body" idx="1"/>
+          </p:nvPr>
+        </p:nvSpPr>
+        <p:spPr/>
+        <p:txBody>
+          <a:bodyPr/>
+          <a:lstStyle/>
+          <a:p>
+            <a:endParaRPr lang="en-US" dirty="0"/>
+          </a:p>
+        </p:txBody>
+      </p:sp>
+      <p:sp>
+        <p:nvSpPr>
+          <p:cNvPr id="4" name="Slide Number Placeholder 3">
+            <a:extLst>
+              <a:ext uri="{FF2B5EF4-FFF2-40B4-BE49-F238E27FC236}">
+                <a16:creationId xmlns:a16="http://schemas.microsoft.com/office/drawing/2014/main" id="{D135C4DE-914F-B703-8AA7-DFB52445AFF7}"/>
+              </a:ext>
+            </a:extLst>
+          </p:cNvPr>
+          <p:cNvSpPr>
+            <a:spLocks noGrp="1"/>
+          </p:cNvSpPr>
+          <p:nvPr>
+            <p:ph type="sldNum" sz="quarter" idx="10"/>
+          </p:nvPr>
+        </p:nvSpPr>
+        <p:spPr/>
+        <p:txBody>
+          <a:bodyPr/>
+          <a:lstStyle/>
+          <a:p>
+            <a:fld id="{F7021451-1387-4CA6-816F-3879F97B5CBC}" type="slidenum">
+              <a:rPr lang="en-US"/>
+              <a:t>47</a:t>
+            </a:fld>
+            <a:endParaRPr lang="en-US"/>
+          </a:p>
+        </p:txBody>
+      </p:sp>
+    </p:spTree>
+    <p:extLst>
+      <p:ext uri="{BB962C8B-B14F-4D97-AF65-F5344CB8AC3E}">
+        <p14:creationId xmlns:p14="http://schemas.microsoft.com/office/powerpoint/2010/main" val="3529846866"/>
       </p:ext>
     </p:extLst>
   </p:cSld>
@@ -43740,6 +44394,620 @@
 </p:sld>
 </file>
 
+<file path=ppt/slides/slide42.xml><?xml version="1.0" encoding="utf-8"?>
+<p:sld xmlns:a="http://schemas.openxmlformats.org/drawingml/2006/main" xmlns:r="http://schemas.openxmlformats.org/officeDocument/2006/relationships" xmlns:p="http://schemas.openxmlformats.org/presentationml/2006/main">
+  <p:cSld>
+    <p:spTree>
+      <p:nvGrpSpPr>
+        <p:cNvPr id="1" name="">
+          <a:extLst>
+            <a:ext uri="{FF2B5EF4-FFF2-40B4-BE49-F238E27FC236}">
+              <a16:creationId xmlns:a16="http://schemas.microsoft.com/office/drawing/2014/main" id="{C4624780-6739-689A-3709-23A7ECFA8301}"/>
+            </a:ext>
+          </a:extLst>
+        </p:cNvPr>
+        <p:cNvGrpSpPr/>
+        <p:nvPr/>
+      </p:nvGrpSpPr>
+      <p:grpSpPr>
+        <a:xfrm>
+          <a:off x="0" y="0"/>
+          <a:ext cx="0" cy="0"/>
+          <a:chOff x="0" y="0"/>
+          <a:chExt cx="0" cy="0"/>
+        </a:xfrm>
+      </p:grpSpPr>
+      <p:sp>
+        <p:nvSpPr>
+          <p:cNvPr id="15" name="내용 개체 틀 31">
+            <a:extLst>
+              <a:ext uri="{FF2B5EF4-FFF2-40B4-BE49-F238E27FC236}">
+                <a16:creationId xmlns:a16="http://schemas.microsoft.com/office/drawing/2014/main" id="{2D6BC927-8303-8838-6D40-2ADF2B2881E1}"/>
+              </a:ext>
+            </a:extLst>
+          </p:cNvPr>
+          <p:cNvSpPr>
+            <a:spLocks noGrp="1"/>
+          </p:cNvSpPr>
+          <p:nvPr>
+            <p:ph sz="quarter" idx="10"/>
+          </p:nvPr>
+        </p:nvSpPr>
+        <p:spPr>
+          <a:xfrm>
+            <a:off x="209360" y="193231"/>
+            <a:ext cx="10944225" cy="458787"/>
+          </a:xfrm>
+        </p:spPr>
+        <p:txBody>
+          <a:bodyPr/>
+          <a:lstStyle/>
+          <a:p>
+            <a:r>
+              <a:rPr lang="ko-KR" altLang="en-US"/>
+              <a:t>클로드</a:t>
+            </a:r>
+            <a:r>
+              <a:rPr lang="en-US" altLang="ko-KR"/>
+              <a:t> </a:t>
+            </a:r>
+            <a:r>
+              <a:rPr lang="ko-KR" altLang="en-US"/>
+              <a:t>실행</a:t>
+            </a:r>
+            <a:endParaRPr lang="en-US" altLang="ko-KR" dirty="0"/>
+          </a:p>
+        </p:txBody>
+      </p:sp>
+      <p:pic>
+        <p:nvPicPr>
+          <p:cNvPr id="5" name="그림 4">
+            <a:extLst>
+              <a:ext uri="{FF2B5EF4-FFF2-40B4-BE49-F238E27FC236}">
+                <a16:creationId xmlns:a16="http://schemas.microsoft.com/office/drawing/2014/main" id="{8FE57525-B086-A65F-80D8-C5056F3C982B}"/>
+              </a:ext>
+            </a:extLst>
+          </p:cNvPr>
+          <p:cNvPicPr>
+            <a:picLocks noChangeAspect="1"/>
+          </p:cNvPicPr>
+          <p:nvPr/>
+        </p:nvPicPr>
+        <p:blipFill>
+          <a:blip r:embed="rId3"/>
+          <a:srcRect/>
+          <a:stretch/>
+        </p:blipFill>
+        <p:spPr>
+          <a:xfrm>
+            <a:off x="3796532" y="714819"/>
+            <a:ext cx="8304764" cy="5949949"/>
+          </a:xfrm>
+          <a:prstGeom prst="rect">
+            <a:avLst/>
+          </a:prstGeom>
+        </p:spPr>
+      </p:pic>
+    </p:spTree>
+    <p:extLst>
+      <p:ext uri="{BB962C8B-B14F-4D97-AF65-F5344CB8AC3E}">
+        <p14:creationId xmlns:p14="http://schemas.microsoft.com/office/powerpoint/2010/main" val="2443112853"/>
+      </p:ext>
+    </p:extLst>
+  </p:cSld>
+  <p:clrMapOvr>
+    <a:masterClrMapping/>
+  </p:clrMapOvr>
+</p:sld>
+</file>
+
+<file path=ppt/slides/slide43.xml><?xml version="1.0" encoding="utf-8"?>
+<p:sld xmlns:a="http://schemas.openxmlformats.org/drawingml/2006/main" xmlns:r="http://schemas.openxmlformats.org/officeDocument/2006/relationships" xmlns:p="http://schemas.openxmlformats.org/presentationml/2006/main">
+  <p:cSld>
+    <p:spTree>
+      <p:nvGrpSpPr>
+        <p:cNvPr id="1" name="">
+          <a:extLst>
+            <a:ext uri="{FF2B5EF4-FFF2-40B4-BE49-F238E27FC236}">
+              <a16:creationId xmlns:a16="http://schemas.microsoft.com/office/drawing/2014/main" id="{DB67B1C5-8DB2-FFE1-8F8E-A418C915A21D}"/>
+            </a:ext>
+          </a:extLst>
+        </p:cNvPr>
+        <p:cNvGrpSpPr/>
+        <p:nvPr/>
+      </p:nvGrpSpPr>
+      <p:grpSpPr>
+        <a:xfrm>
+          <a:off x="0" y="0"/>
+          <a:ext cx="0" cy="0"/>
+          <a:chOff x="0" y="0"/>
+          <a:chExt cx="0" cy="0"/>
+        </a:xfrm>
+      </p:grpSpPr>
+      <p:sp>
+        <p:nvSpPr>
+          <p:cNvPr id="15" name="내용 개체 틀 31">
+            <a:extLst>
+              <a:ext uri="{FF2B5EF4-FFF2-40B4-BE49-F238E27FC236}">
+                <a16:creationId xmlns:a16="http://schemas.microsoft.com/office/drawing/2014/main" id="{72914F43-0961-10F0-A97B-3E8C5E854CAE}"/>
+              </a:ext>
+            </a:extLst>
+          </p:cNvPr>
+          <p:cNvSpPr>
+            <a:spLocks noGrp="1"/>
+          </p:cNvSpPr>
+          <p:nvPr>
+            <p:ph sz="quarter" idx="10"/>
+          </p:nvPr>
+        </p:nvSpPr>
+        <p:spPr>
+          <a:xfrm>
+            <a:off x="209360" y="193231"/>
+            <a:ext cx="10944225" cy="458787"/>
+          </a:xfrm>
+        </p:spPr>
+        <p:txBody>
+          <a:bodyPr/>
+          <a:lstStyle/>
+          <a:p>
+            <a:r>
+              <a:rPr lang="ko-KR" altLang="en-US"/>
+              <a:t>멀티에이전트와 서브에이전트의 설정 확인</a:t>
+            </a:r>
+            <a:endParaRPr lang="en-US" altLang="ko-KR" dirty="0"/>
+          </a:p>
+        </p:txBody>
+      </p:sp>
+      <p:pic>
+        <p:nvPicPr>
+          <p:cNvPr id="5" name="그림 4">
+            <a:extLst>
+              <a:ext uri="{FF2B5EF4-FFF2-40B4-BE49-F238E27FC236}">
+                <a16:creationId xmlns:a16="http://schemas.microsoft.com/office/drawing/2014/main" id="{F97BB690-9F97-E620-8E52-7CC4D372C7FE}"/>
+              </a:ext>
+            </a:extLst>
+          </p:cNvPr>
+          <p:cNvPicPr>
+            <a:picLocks noChangeAspect="1"/>
+          </p:cNvPicPr>
+          <p:nvPr/>
+        </p:nvPicPr>
+        <p:blipFill>
+          <a:blip r:embed="rId3"/>
+          <a:srcRect/>
+          <a:stretch/>
+        </p:blipFill>
+        <p:spPr>
+          <a:xfrm>
+            <a:off x="3796533" y="714819"/>
+            <a:ext cx="8304762" cy="5949949"/>
+          </a:xfrm>
+          <a:prstGeom prst="rect">
+            <a:avLst/>
+          </a:prstGeom>
+        </p:spPr>
+      </p:pic>
+    </p:spTree>
+    <p:extLst>
+      <p:ext uri="{BB962C8B-B14F-4D97-AF65-F5344CB8AC3E}">
+        <p14:creationId xmlns:p14="http://schemas.microsoft.com/office/powerpoint/2010/main" val="984657811"/>
+      </p:ext>
+    </p:extLst>
+  </p:cSld>
+  <p:clrMapOvr>
+    <a:masterClrMapping/>
+  </p:clrMapOvr>
+</p:sld>
+</file>
+
+<file path=ppt/slides/slide44.xml><?xml version="1.0" encoding="utf-8"?>
+<p:sld xmlns:a="http://schemas.openxmlformats.org/drawingml/2006/main" xmlns:r="http://schemas.openxmlformats.org/officeDocument/2006/relationships" xmlns:p="http://schemas.openxmlformats.org/presentationml/2006/main">
+  <p:cSld>
+    <p:spTree>
+      <p:nvGrpSpPr>
+        <p:cNvPr id="1" name="">
+          <a:extLst>
+            <a:ext uri="{FF2B5EF4-FFF2-40B4-BE49-F238E27FC236}">
+              <a16:creationId xmlns:a16="http://schemas.microsoft.com/office/drawing/2014/main" id="{D80660CE-E740-749E-C469-CB9F8D145A8F}"/>
+            </a:ext>
+          </a:extLst>
+        </p:cNvPr>
+        <p:cNvGrpSpPr/>
+        <p:nvPr/>
+      </p:nvGrpSpPr>
+      <p:grpSpPr>
+        <a:xfrm>
+          <a:off x="0" y="0"/>
+          <a:ext cx="0" cy="0"/>
+          <a:chOff x="0" y="0"/>
+          <a:chExt cx="0" cy="0"/>
+        </a:xfrm>
+      </p:grpSpPr>
+      <p:sp>
+        <p:nvSpPr>
+          <p:cNvPr id="15" name="내용 개체 틀 31">
+            <a:extLst>
+              <a:ext uri="{FF2B5EF4-FFF2-40B4-BE49-F238E27FC236}">
+                <a16:creationId xmlns:a16="http://schemas.microsoft.com/office/drawing/2014/main" id="{31FB1D91-29B9-0FC6-AC88-04B88E525756}"/>
+              </a:ext>
+            </a:extLst>
+          </p:cNvPr>
+          <p:cNvSpPr>
+            <a:spLocks noGrp="1"/>
+          </p:cNvSpPr>
+          <p:nvPr>
+            <p:ph sz="quarter" idx="10"/>
+          </p:nvPr>
+        </p:nvSpPr>
+        <p:spPr>
+          <a:xfrm>
+            <a:off x="209360" y="193231"/>
+            <a:ext cx="10944225" cy="458787"/>
+          </a:xfrm>
+        </p:spPr>
+        <p:txBody>
+          <a:bodyPr/>
+          <a:lstStyle/>
+          <a:p>
+            <a:r>
+              <a:rPr lang="ko-KR" altLang="en-US"/>
+              <a:t>오케스트레이션에서 </a:t>
+            </a:r>
+            <a:r>
+              <a:rPr lang="en-US" altLang="ko-KR"/>
+              <a:t>MSA </a:t>
+            </a:r>
+            <a:r>
+              <a:rPr lang="ko-KR" altLang="en-US"/>
+              <a:t>프로젝트를 로드</a:t>
+            </a:r>
+            <a:endParaRPr lang="en-US" altLang="ko-KR" dirty="0"/>
+          </a:p>
+        </p:txBody>
+      </p:sp>
+      <p:pic>
+        <p:nvPicPr>
+          <p:cNvPr id="5" name="그림 4">
+            <a:extLst>
+              <a:ext uri="{FF2B5EF4-FFF2-40B4-BE49-F238E27FC236}">
+                <a16:creationId xmlns:a16="http://schemas.microsoft.com/office/drawing/2014/main" id="{F2FD9457-C679-03F3-29E0-0A6FA3A64688}"/>
+              </a:ext>
+            </a:extLst>
+          </p:cNvPr>
+          <p:cNvPicPr>
+            <a:picLocks noChangeAspect="1"/>
+          </p:cNvPicPr>
+          <p:nvPr/>
+        </p:nvPicPr>
+        <p:blipFill>
+          <a:blip r:embed="rId3"/>
+          <a:srcRect/>
+          <a:stretch/>
+        </p:blipFill>
+        <p:spPr>
+          <a:xfrm>
+            <a:off x="3796533" y="714819"/>
+            <a:ext cx="8304762" cy="5949948"/>
+          </a:xfrm>
+          <a:prstGeom prst="rect">
+            <a:avLst/>
+          </a:prstGeom>
+        </p:spPr>
+      </p:pic>
+    </p:spTree>
+    <p:extLst>
+      <p:ext uri="{BB962C8B-B14F-4D97-AF65-F5344CB8AC3E}">
+        <p14:creationId xmlns:p14="http://schemas.microsoft.com/office/powerpoint/2010/main" val="945045758"/>
+      </p:ext>
+    </p:extLst>
+  </p:cSld>
+  <p:clrMapOvr>
+    <a:masterClrMapping/>
+  </p:clrMapOvr>
+</p:sld>
+</file>
+
+<file path=ppt/slides/slide45.xml><?xml version="1.0" encoding="utf-8"?>
+<p:sld xmlns:a="http://schemas.openxmlformats.org/drawingml/2006/main" xmlns:r="http://schemas.openxmlformats.org/officeDocument/2006/relationships" xmlns:p="http://schemas.openxmlformats.org/presentationml/2006/main">
+  <p:cSld>
+    <p:spTree>
+      <p:nvGrpSpPr>
+        <p:cNvPr id="1" name="">
+          <a:extLst>
+            <a:ext uri="{FF2B5EF4-FFF2-40B4-BE49-F238E27FC236}">
+              <a16:creationId xmlns:a16="http://schemas.microsoft.com/office/drawing/2014/main" id="{B19C8908-6112-CC29-BF42-7ABAC1FBF36A}"/>
+            </a:ext>
+          </a:extLst>
+        </p:cNvPr>
+        <p:cNvGrpSpPr/>
+        <p:nvPr/>
+      </p:nvGrpSpPr>
+      <p:grpSpPr>
+        <a:xfrm>
+          <a:off x="0" y="0"/>
+          <a:ext cx="0" cy="0"/>
+          <a:chOff x="0" y="0"/>
+          <a:chExt cx="0" cy="0"/>
+        </a:xfrm>
+      </p:grpSpPr>
+      <p:sp>
+        <p:nvSpPr>
+          <p:cNvPr id="15" name="내용 개체 틀 31">
+            <a:extLst>
+              <a:ext uri="{FF2B5EF4-FFF2-40B4-BE49-F238E27FC236}">
+                <a16:creationId xmlns:a16="http://schemas.microsoft.com/office/drawing/2014/main" id="{4EA1AC91-AE51-E1E3-5ECB-E883E6E9E90D}"/>
+              </a:ext>
+            </a:extLst>
+          </p:cNvPr>
+          <p:cNvSpPr>
+            <a:spLocks noGrp="1"/>
+          </p:cNvSpPr>
+          <p:nvPr>
+            <p:ph sz="quarter" idx="10"/>
+          </p:nvPr>
+        </p:nvSpPr>
+        <p:spPr>
+          <a:xfrm>
+            <a:off x="209360" y="193231"/>
+            <a:ext cx="10944225" cy="458787"/>
+          </a:xfrm>
+        </p:spPr>
+        <p:txBody>
+          <a:bodyPr/>
+          <a:lstStyle/>
+          <a:p>
+            <a:r>
+              <a:rPr lang="en-US" altLang="ko-KR"/>
+              <a:t>MSA</a:t>
+            </a:r>
+            <a:r>
+              <a:rPr lang="ko-KR" altLang="en-US"/>
+              <a:t> 구조에서 인공지능을 활용한 개발 방식</a:t>
+            </a:r>
+            <a:endParaRPr lang="en-US" altLang="ko-KR" dirty="0"/>
+          </a:p>
+        </p:txBody>
+      </p:sp>
+      <p:pic>
+        <p:nvPicPr>
+          <p:cNvPr id="5" name="그림 4">
+            <a:extLst>
+              <a:ext uri="{FF2B5EF4-FFF2-40B4-BE49-F238E27FC236}">
+                <a16:creationId xmlns:a16="http://schemas.microsoft.com/office/drawing/2014/main" id="{1189F858-471A-AE7E-B246-0BE4630A965D}"/>
+              </a:ext>
+            </a:extLst>
+          </p:cNvPr>
+          <p:cNvPicPr>
+            <a:picLocks noChangeAspect="1"/>
+          </p:cNvPicPr>
+          <p:nvPr/>
+        </p:nvPicPr>
+        <p:blipFill>
+          <a:blip r:embed="rId3"/>
+          <a:srcRect/>
+          <a:stretch/>
+        </p:blipFill>
+        <p:spPr>
+          <a:xfrm>
+            <a:off x="3796533" y="714819"/>
+            <a:ext cx="8304761" cy="5949948"/>
+          </a:xfrm>
+          <a:prstGeom prst="rect">
+            <a:avLst/>
+          </a:prstGeom>
+        </p:spPr>
+      </p:pic>
+    </p:spTree>
+    <p:extLst>
+      <p:ext uri="{BB962C8B-B14F-4D97-AF65-F5344CB8AC3E}">
+        <p14:creationId xmlns:p14="http://schemas.microsoft.com/office/powerpoint/2010/main" val="3468754231"/>
+      </p:ext>
+    </p:extLst>
+  </p:cSld>
+  <p:clrMapOvr>
+    <a:masterClrMapping/>
+  </p:clrMapOvr>
+</p:sld>
+</file>
+
+<file path=ppt/slides/slide46.xml><?xml version="1.0" encoding="utf-8"?>
+<p:sld xmlns:a="http://schemas.openxmlformats.org/drawingml/2006/main" xmlns:r="http://schemas.openxmlformats.org/officeDocument/2006/relationships" xmlns:p="http://schemas.openxmlformats.org/presentationml/2006/main">
+  <p:cSld>
+    <p:spTree>
+      <p:nvGrpSpPr>
+        <p:cNvPr id="1" name="">
+          <a:extLst>
+            <a:ext uri="{FF2B5EF4-FFF2-40B4-BE49-F238E27FC236}">
+              <a16:creationId xmlns:a16="http://schemas.microsoft.com/office/drawing/2014/main" id="{297109F9-D498-4EAD-17A5-2F9F3480244E}"/>
+            </a:ext>
+          </a:extLst>
+        </p:cNvPr>
+        <p:cNvGrpSpPr/>
+        <p:nvPr/>
+      </p:nvGrpSpPr>
+      <p:grpSpPr>
+        <a:xfrm>
+          <a:off x="0" y="0"/>
+          <a:ext cx="0" cy="0"/>
+          <a:chOff x="0" y="0"/>
+          <a:chExt cx="0" cy="0"/>
+        </a:xfrm>
+      </p:grpSpPr>
+      <p:sp>
+        <p:nvSpPr>
+          <p:cNvPr id="15" name="내용 개체 틀 31">
+            <a:extLst>
+              <a:ext uri="{FF2B5EF4-FFF2-40B4-BE49-F238E27FC236}">
+                <a16:creationId xmlns:a16="http://schemas.microsoft.com/office/drawing/2014/main" id="{69FAFBDA-DBDE-C8FD-06CD-E43EC6BB3F5A}"/>
+              </a:ext>
+            </a:extLst>
+          </p:cNvPr>
+          <p:cNvSpPr>
+            <a:spLocks noGrp="1"/>
+          </p:cNvSpPr>
+          <p:nvPr>
+            <p:ph sz="quarter" idx="10"/>
+          </p:nvPr>
+        </p:nvSpPr>
+        <p:spPr>
+          <a:xfrm>
+            <a:off x="209360" y="193231"/>
+            <a:ext cx="10944225" cy="458787"/>
+          </a:xfrm>
+        </p:spPr>
+        <p:txBody>
+          <a:bodyPr/>
+          <a:lstStyle/>
+          <a:p>
+            <a:r>
+              <a:rPr lang="ko-KR" altLang="en-US"/>
+              <a:t>모니터링 할 테스크 선택</a:t>
+            </a:r>
+            <a:endParaRPr lang="en-US" altLang="ko-KR" dirty="0"/>
+          </a:p>
+        </p:txBody>
+      </p:sp>
+      <p:pic>
+        <p:nvPicPr>
+          <p:cNvPr id="5" name="그림 4">
+            <a:extLst>
+              <a:ext uri="{FF2B5EF4-FFF2-40B4-BE49-F238E27FC236}">
+                <a16:creationId xmlns:a16="http://schemas.microsoft.com/office/drawing/2014/main" id="{2EA03644-F837-B0AC-C66F-8C4670F384A3}"/>
+              </a:ext>
+            </a:extLst>
+          </p:cNvPr>
+          <p:cNvPicPr>
+            <a:picLocks noChangeAspect="1"/>
+          </p:cNvPicPr>
+          <p:nvPr/>
+        </p:nvPicPr>
+        <p:blipFill>
+          <a:blip r:embed="rId3"/>
+          <a:srcRect/>
+          <a:stretch/>
+        </p:blipFill>
+        <p:spPr>
+          <a:xfrm>
+            <a:off x="3796533" y="714819"/>
+            <a:ext cx="8304761" cy="5949947"/>
+          </a:xfrm>
+          <a:prstGeom prst="rect">
+            <a:avLst/>
+          </a:prstGeom>
+        </p:spPr>
+      </p:pic>
+    </p:spTree>
+    <p:extLst>
+      <p:ext uri="{BB962C8B-B14F-4D97-AF65-F5344CB8AC3E}">
+        <p14:creationId xmlns:p14="http://schemas.microsoft.com/office/powerpoint/2010/main" val="724655672"/>
+      </p:ext>
+    </p:extLst>
+  </p:cSld>
+  <p:clrMapOvr>
+    <a:masterClrMapping/>
+  </p:clrMapOvr>
+</p:sld>
+</file>
+
+<file path=ppt/slides/slide47.xml><?xml version="1.0" encoding="utf-8"?>
+<p:sld xmlns:a="http://schemas.openxmlformats.org/drawingml/2006/main" xmlns:r="http://schemas.openxmlformats.org/officeDocument/2006/relationships" xmlns:p="http://schemas.openxmlformats.org/presentationml/2006/main">
+  <p:cSld>
+    <p:spTree>
+      <p:nvGrpSpPr>
+        <p:cNvPr id="1" name="">
+          <a:extLst>
+            <a:ext uri="{FF2B5EF4-FFF2-40B4-BE49-F238E27FC236}">
+              <a16:creationId xmlns:a16="http://schemas.microsoft.com/office/drawing/2014/main" id="{956D3634-D7A8-7D67-E9A9-97D0B208A16C}"/>
+            </a:ext>
+          </a:extLst>
+        </p:cNvPr>
+        <p:cNvGrpSpPr/>
+        <p:nvPr/>
+      </p:nvGrpSpPr>
+      <p:grpSpPr>
+        <a:xfrm>
+          <a:off x="0" y="0"/>
+          <a:ext cx="0" cy="0"/>
+          <a:chOff x="0" y="0"/>
+          <a:chExt cx="0" cy="0"/>
+        </a:xfrm>
+      </p:grpSpPr>
+      <p:sp>
+        <p:nvSpPr>
+          <p:cNvPr id="15" name="내용 개체 틀 31">
+            <a:extLst>
+              <a:ext uri="{FF2B5EF4-FFF2-40B4-BE49-F238E27FC236}">
+                <a16:creationId xmlns:a16="http://schemas.microsoft.com/office/drawing/2014/main" id="{12C20B68-4FA7-E462-9620-D2D6F5DC2BCA}"/>
+              </a:ext>
+            </a:extLst>
+          </p:cNvPr>
+          <p:cNvSpPr>
+            <a:spLocks noGrp="1"/>
+          </p:cNvSpPr>
+          <p:nvPr>
+            <p:ph sz="quarter" idx="10"/>
+          </p:nvPr>
+        </p:nvSpPr>
+        <p:spPr>
+          <a:xfrm>
+            <a:off x="209360" y="193231"/>
+            <a:ext cx="10944225" cy="458787"/>
+          </a:xfrm>
+        </p:spPr>
+        <p:txBody>
+          <a:bodyPr/>
+          <a:lstStyle/>
+          <a:p>
+            <a:r>
+              <a:rPr lang="ko-KR" altLang="en-US"/>
+              <a:t>에이전트 모니터링</a:t>
+            </a:r>
+            <a:endParaRPr lang="en-US" altLang="ko-KR" dirty="0"/>
+          </a:p>
+        </p:txBody>
+      </p:sp>
+      <p:pic>
+        <p:nvPicPr>
+          <p:cNvPr id="5" name="그림 4">
+            <a:extLst>
+              <a:ext uri="{FF2B5EF4-FFF2-40B4-BE49-F238E27FC236}">
+                <a16:creationId xmlns:a16="http://schemas.microsoft.com/office/drawing/2014/main" id="{2C4BE3E1-39B0-0F53-F5FD-E1A25D88F2C5}"/>
+              </a:ext>
+            </a:extLst>
+          </p:cNvPr>
+          <p:cNvPicPr>
+            <a:picLocks noChangeAspect="1"/>
+          </p:cNvPicPr>
+          <p:nvPr/>
+        </p:nvPicPr>
+        <p:blipFill>
+          <a:blip r:embed="rId3"/>
+          <a:srcRect/>
+          <a:stretch/>
+        </p:blipFill>
+        <p:spPr>
+          <a:xfrm>
+            <a:off x="3796534" y="714819"/>
+            <a:ext cx="8304759" cy="5949947"/>
+          </a:xfrm>
+          <a:prstGeom prst="rect">
+            <a:avLst/>
+          </a:prstGeom>
+        </p:spPr>
+      </p:pic>
+    </p:spTree>
+    <p:extLst>
+      <p:ext uri="{BB962C8B-B14F-4D97-AF65-F5344CB8AC3E}">
+        <p14:creationId xmlns:p14="http://schemas.microsoft.com/office/powerpoint/2010/main" val="1926139852"/>
+      </p:ext>
+    </p:extLst>
+  </p:cSld>
+  <p:clrMapOvr>
+    <a:masterClrMapping/>
+  </p:clrMapOvr>
+</p:sld>
+</file>
+
 <file path=ppt/slides/slide5.xml><?xml version="1.0" encoding="utf-8"?>
 <p:sld xmlns:a="http://schemas.openxmlformats.org/drawingml/2006/main" xmlns:r="http://schemas.openxmlformats.org/officeDocument/2006/relationships" xmlns:p="http://schemas.openxmlformats.org/presentationml/2006/main">
   <p:cSld>

--- a/Multi_Sub_Agent_USE_Manual.pptx
+++ b/Multi_Sub_Agent_USE_Manual.pptx
@@ -5,7 +5,7 @@
     <p:sldMasterId id="2147483649" r:id="rId1"/>
   </p:sldMasterIdLst>
   <p:notesMasterIdLst>
-    <p:notesMasterId r:id="rId49"/>
+    <p:notesMasterId r:id="rId50"/>
   </p:notesMasterIdLst>
   <p:sldIdLst>
     <p:sldId id="256" r:id="rId2"/>
@@ -48,13 +48,14 @@
     <p:sldId id="293" r:id="rId39"/>
     <p:sldId id="294" r:id="rId40"/>
     <p:sldId id="301" r:id="rId41"/>
-    <p:sldId id="326" r:id="rId42"/>
-    <p:sldId id="327" r:id="rId43"/>
-    <p:sldId id="328" r:id="rId44"/>
-    <p:sldId id="329" r:id="rId45"/>
-    <p:sldId id="330" r:id="rId46"/>
-    <p:sldId id="331" r:id="rId47"/>
-    <p:sldId id="332" r:id="rId48"/>
+    <p:sldId id="333" r:id="rId42"/>
+    <p:sldId id="326" r:id="rId43"/>
+    <p:sldId id="327" r:id="rId44"/>
+    <p:sldId id="328" r:id="rId45"/>
+    <p:sldId id="329" r:id="rId46"/>
+    <p:sldId id="330" r:id="rId47"/>
+    <p:sldId id="331" r:id="rId48"/>
+    <p:sldId id="332" r:id="rId49"/>
   </p:sldIdLst>
   <p:sldSz cx="12192000" cy="6858000"/>
   <p:notesSz cx="6858000" cy="12192000"/>
@@ -5434,7 +5435,7 @@
           <a:p>
             <a:fld id="{F7021451-1387-4CA6-816F-3879F97B5CBC}" type="slidenum">
               <a:rPr lang="en-US"/>
-              <a:t>41</a:t>
+              <a:t>42</a:t>
             </a:fld>
             <a:endParaRPr lang="en-US"/>
           </a:p>
@@ -5542,7 +5543,7 @@
           <a:p>
             <a:fld id="{F7021451-1387-4CA6-816F-3879F97B5CBC}" type="slidenum">
               <a:rPr lang="en-US"/>
-              <a:t>42</a:t>
+              <a:t>43</a:t>
             </a:fld>
             <a:endParaRPr lang="en-US"/>
           </a:p>
@@ -5650,7 +5651,7 @@
           <a:p>
             <a:fld id="{F7021451-1387-4CA6-816F-3879F97B5CBC}" type="slidenum">
               <a:rPr lang="en-US"/>
-              <a:t>43</a:t>
+              <a:t>44</a:t>
             </a:fld>
             <a:endParaRPr lang="en-US"/>
           </a:p>
@@ -5758,7 +5759,7 @@
           <a:p>
             <a:fld id="{F7021451-1387-4CA6-816F-3879F97B5CBC}" type="slidenum">
               <a:rPr lang="en-US"/>
-              <a:t>44</a:t>
+              <a:t>45</a:t>
             </a:fld>
             <a:endParaRPr lang="en-US"/>
           </a:p>
@@ -5866,7 +5867,7 @@
           <a:p>
             <a:fld id="{F7021451-1387-4CA6-816F-3879F97B5CBC}" type="slidenum">
               <a:rPr lang="en-US"/>
-              <a:t>45</a:t>
+              <a:t>46</a:t>
             </a:fld>
             <a:endParaRPr lang="en-US"/>
           </a:p>
@@ -5974,7 +5975,7 @@
           <a:p>
             <a:fld id="{F7021451-1387-4CA6-816F-3879F97B5CBC}" type="slidenum">
               <a:rPr lang="en-US"/>
-              <a:t>46</a:t>
+              <a:t>47</a:t>
             </a:fld>
             <a:endParaRPr lang="en-US"/>
           </a:p>
@@ -6082,7 +6083,7 @@
           <a:p>
             <a:fld id="{F7021451-1387-4CA6-816F-3879F97B5CBC}" type="slidenum">
               <a:rPr lang="en-US"/>
-              <a:t>47</a:t>
+              <a:t>48</a:t>
             </a:fld>
             <a:endParaRPr lang="en-US"/>
           </a:p>
@@ -44129,6 +44130,102 @@
   <p:cSld>
     <p:spTree>
       <p:nvGrpSpPr>
+        <p:cNvPr id="1" name=""/>
+        <p:cNvGrpSpPr/>
+        <p:nvPr/>
+      </p:nvGrpSpPr>
+      <p:grpSpPr>
+        <a:xfrm>
+          <a:off x="0" y="0"/>
+          <a:ext cx="0" cy="0"/>
+          <a:chOff x="0" y="0"/>
+          <a:chExt cx="0" cy="0"/>
+        </a:xfrm>
+      </p:grpSpPr>
+      <p:sp>
+        <p:nvSpPr>
+          <p:cNvPr id="2" name="내용 개체 틀 1">
+            <a:extLst>
+              <a:ext uri="{FF2B5EF4-FFF2-40B4-BE49-F238E27FC236}">
+                <a16:creationId xmlns:a16="http://schemas.microsoft.com/office/drawing/2014/main" id="{0B8F239E-7C28-0467-67B3-29D411F3D996}"/>
+              </a:ext>
+            </a:extLst>
+          </p:cNvPr>
+          <p:cNvSpPr>
+            <a:spLocks noGrp="1"/>
+          </p:cNvSpPr>
+          <p:nvPr>
+            <p:ph sz="quarter" idx="10"/>
+          </p:nvPr>
+        </p:nvSpPr>
+        <p:spPr/>
+        <p:txBody>
+          <a:bodyPr/>
+          <a:lstStyle/>
+          <a:p>
+            <a:r>
+              <a:rPr lang="en-US" altLang="ko-KR"/>
+              <a:t>$env:KNOT_VAULT = "C:\DEV\sourcecode\Java-Service-Tree-Framework\knot-vault"</a:t>
+            </a:r>
+          </a:p>
+          <a:p>
+            <a:endParaRPr lang="en-US" altLang="ko-KR"/>
+          </a:p>
+          <a:p>
+            <a:r>
+              <a:rPr lang="ko-KR" altLang="en-US"/>
+              <a:t>컨테스트 파일에 </a:t>
+            </a:r>
+            <a:r>
+              <a:rPr lang="en-US" altLang="ko-KR"/>
+              <a:t>knot </a:t>
+            </a:r>
+            <a:r>
+              <a:rPr lang="ko-KR" altLang="en-US"/>
+              <a:t>자동층</a:t>
+            </a:r>
+            <a:r>
+              <a:rPr lang="en-US" altLang="ko-KR"/>
+              <a:t>(</a:t>
+            </a:r>
+            <a:r>
+              <a:rPr lang="ko-KR" altLang="en-US"/>
+              <a:t>관리블록</a:t>
+            </a:r>
+            <a:r>
+              <a:rPr lang="en-US" altLang="ko-KR"/>
+              <a:t>)</a:t>
+            </a:r>
+            <a:r>
+              <a:rPr lang="ko-KR" altLang="en-US"/>
+              <a:t>을 추가</a:t>
+            </a:r>
+            <a:r>
+              <a:rPr lang="en-US" altLang="ko-KR"/>
+              <a:t>.</a:t>
+            </a:r>
+            <a:endParaRPr lang="ko-KR" altLang="en-US"/>
+          </a:p>
+        </p:txBody>
+      </p:sp>
+    </p:spTree>
+    <p:extLst>
+      <p:ext uri="{BB962C8B-B14F-4D97-AF65-F5344CB8AC3E}">
+        <p14:creationId xmlns:p14="http://schemas.microsoft.com/office/powerpoint/2010/main" val="3737128480"/>
+      </p:ext>
+    </p:extLst>
+  </p:cSld>
+  <p:clrMapOvr>
+    <a:masterClrMapping/>
+  </p:clrMapOvr>
+</p:sld>
+</file>
+
+<file path=ppt/slides/slide42.xml><?xml version="1.0" encoding="utf-8"?>
+<p:sld xmlns:a="http://schemas.openxmlformats.org/drawingml/2006/main" xmlns:r="http://schemas.openxmlformats.org/officeDocument/2006/relationships" xmlns:p="http://schemas.openxmlformats.org/presentationml/2006/main">
+  <p:cSld>
+    <p:spTree>
+      <p:nvGrpSpPr>
         <p:cNvPr id="1" name="">
           <a:extLst>
             <a:ext uri="{FF2B5EF4-FFF2-40B4-BE49-F238E27FC236}">
@@ -44394,7 +44491,7 @@
 </p:sld>
 </file>
 
-<file path=ppt/slides/slide42.xml><?xml version="1.0" encoding="utf-8"?>
+<file path=ppt/slides/slide43.xml><?xml version="1.0" encoding="utf-8"?>
 <p:sld xmlns:a="http://schemas.openxmlformats.org/drawingml/2006/main" xmlns:r="http://schemas.openxmlformats.org/officeDocument/2006/relationships" xmlns:p="http://schemas.openxmlformats.org/presentationml/2006/main">
   <p:cSld>
     <p:spTree>
@@ -44501,7 +44598,7 @@
 </p:sld>
 </file>
 
-<file path=ppt/slides/slide43.xml><?xml version="1.0" encoding="utf-8"?>
+<file path=ppt/slides/slide44.xml><?xml version="1.0" encoding="utf-8"?>
 <p:sld xmlns:a="http://schemas.openxmlformats.org/drawingml/2006/main" xmlns:r="http://schemas.openxmlformats.org/officeDocument/2006/relationships" xmlns:p="http://schemas.openxmlformats.org/presentationml/2006/main">
   <p:cSld>
     <p:spTree>
@@ -44600,7 +44697,7 @@
 </p:sld>
 </file>
 
-<file path=ppt/slides/slide44.xml><?xml version="1.0" encoding="utf-8"?>
+<file path=ppt/slides/slide45.xml><?xml version="1.0" encoding="utf-8"?>
 <p:sld xmlns:a="http://schemas.openxmlformats.org/drawingml/2006/main" xmlns:r="http://schemas.openxmlformats.org/officeDocument/2006/relationships" xmlns:p="http://schemas.openxmlformats.org/presentationml/2006/main">
   <p:cSld>
     <p:spTree>
@@ -44707,7 +44804,7 @@
 </p:sld>
 </file>
 
-<file path=ppt/slides/slide45.xml><?xml version="1.0" encoding="utf-8"?>
+<file path=ppt/slides/slide46.xml><?xml version="1.0" encoding="utf-8"?>
 <p:sld xmlns:a="http://schemas.openxmlformats.org/drawingml/2006/main" xmlns:r="http://schemas.openxmlformats.org/officeDocument/2006/relationships" xmlns:p="http://schemas.openxmlformats.org/presentationml/2006/main">
   <p:cSld>
     <p:spTree>
@@ -44810,7 +44907,7 @@
 </p:sld>
 </file>
 
-<file path=ppt/slides/slide46.xml><?xml version="1.0" encoding="utf-8"?>
+<file path=ppt/slides/slide47.xml><?xml version="1.0" encoding="utf-8"?>
 <p:sld xmlns:a="http://schemas.openxmlformats.org/drawingml/2006/main" xmlns:r="http://schemas.openxmlformats.org/officeDocument/2006/relationships" xmlns:p="http://schemas.openxmlformats.org/presentationml/2006/main">
   <p:cSld>
     <p:spTree>
@@ -44909,7 +45006,7 @@
 </p:sld>
 </file>
 
-<file path=ppt/slides/slide47.xml><?xml version="1.0" encoding="utf-8"?>
+<file path=ppt/slides/slide48.xml><?xml version="1.0" encoding="utf-8"?>
 <p:sld xmlns:a="http://schemas.openxmlformats.org/drawingml/2006/main" xmlns:r="http://schemas.openxmlformats.org/officeDocument/2006/relationships" xmlns:p="http://schemas.openxmlformats.org/presentationml/2006/main">
   <p:cSld>
     <p:spTree>

--- a/Multi_Sub_Agent_USE_Manual.pptx
+++ b/Multi_Sub_Agent_USE_Manual.pptx
@@ -44164,47 +44164,214 @@
           <a:lstStyle/>
           <a:p>
             <a:r>
-              <a:rPr lang="en-US" altLang="ko-KR"/>
+              <a:rPr lang="en-US" altLang="ko-KR" sz="1600"/>
               <a:t>$env:KNOT_VAULT = "C:\DEV\sourcecode\Java-Service-Tree-Framework\knot-vault"</a:t>
             </a:r>
           </a:p>
           <a:p>
-            <a:endParaRPr lang="en-US" altLang="ko-KR"/>
-          </a:p>
-          <a:p>
-            <a:r>
-              <a:rPr lang="ko-KR" altLang="en-US"/>
+            <a:endParaRPr lang="en-US" altLang="ko-KR" sz="1600"/>
+          </a:p>
+          <a:p>
+            <a:r>
+              <a:rPr lang="ko-KR" altLang="en-US" sz="1600"/>
               <a:t>컨테스트 파일에 </a:t>
             </a:r>
             <a:r>
-              <a:rPr lang="en-US" altLang="ko-KR"/>
+              <a:rPr lang="en-US" altLang="ko-KR" sz="1600"/>
               <a:t>knot </a:t>
             </a:r>
             <a:r>
-              <a:rPr lang="ko-KR" altLang="en-US"/>
+              <a:rPr lang="ko-KR" altLang="en-US" sz="1600"/>
               <a:t>자동층</a:t>
             </a:r>
             <a:r>
-              <a:rPr lang="en-US" altLang="ko-KR"/>
+              <a:rPr lang="en-US" altLang="ko-KR" sz="1600"/>
               <a:t>(</a:t>
             </a:r>
             <a:r>
-              <a:rPr lang="ko-KR" altLang="en-US"/>
+              <a:rPr lang="ko-KR" altLang="en-US" sz="1600"/>
               <a:t>관리블록</a:t>
             </a:r>
             <a:r>
-              <a:rPr lang="en-US" altLang="ko-KR"/>
+              <a:rPr lang="en-US" altLang="ko-KR" sz="1600"/>
               <a:t>)</a:t>
             </a:r>
             <a:r>
-              <a:rPr lang="ko-KR" altLang="en-US"/>
+              <a:rPr lang="ko-KR" altLang="en-US" sz="1600"/>
               <a:t>을 추가</a:t>
             </a:r>
             <a:r>
-              <a:rPr lang="en-US" altLang="ko-KR"/>
+              <a:rPr lang="en-US" altLang="ko-KR" sz="1600"/>
               <a:t>.</a:t>
             </a:r>
-            <a:endParaRPr lang="ko-KR" altLang="en-US"/>
+          </a:p>
+          <a:p>
+            <a:endParaRPr lang="en-US" altLang="ko-KR" sz="1600"/>
+          </a:p>
+          <a:p>
+            <a:endParaRPr lang="en-US" altLang="ko-KR" sz="1600"/>
+          </a:p>
+          <a:p>
+            <a:r>
+              <a:rPr lang="ko-KR" altLang="ko-KR" sz="1600" b="1"/>
+              <a:t>knot 플러그인이란</a:t>
+            </a:r>
+          </a:p>
+          <a:p>
+            <a:r>
+              <a:rPr lang="ko-KR" altLang="ko-KR" sz="1600"/>
+              <a:t>$KNOT_VAULT 지식 vault를 다루는 </a:t>
+            </a:r>
+            <a:r>
+              <a:rPr lang="ko-KR" altLang="ko-KR" sz="1600" b="1"/>
+              <a:t>동작 4개(verb)</a:t>
+            </a:r>
+            <a:r>
+              <a:rPr lang="ko-KR" altLang="ko-KR" sz="1600"/>
+              <a:t> 스킬입니다. 핵심 설계는 </a:t>
+            </a:r>
+            <a:r>
+              <a:rPr lang="ko-KR" altLang="ko-KR" sz="1600" b="1"/>
+              <a:t>"로직은 vault에만 있다"</a:t>
+            </a:r>
+            <a:r>
+              <a:rPr lang="ko-KR" altLang="ko-KR" sz="1600"/>
+              <a:t> — 플러그인은 $KNOT_VAULT/prompts/·scripts/를 가리키는 얇은 shim일 뿐입니다. 절차를 고칠 땐 vault 한 곳만 고칩니다(정본 단일화). 덕분에 Claude Code·Codex·agy 어디서 불러도 같은 vault prompts를 타서 결과가 같습니다.</a:t>
+            </a:r>
+          </a:p>
+          <a:p>
+            <a:r>
+              <a:rPr lang="ko-KR" altLang="ko-KR" sz="1600" b="1"/>
+              <a:t>지식 추가하는 방법 — 2단계</a:t>
+            </a:r>
+          </a:p>
+          <a:p>
+            <a:r>
+              <a:rPr lang="ko-KR" altLang="ko-KR" sz="1600"/>
+              <a:t>핵심은 </a:t>
+            </a:r>
+            <a:r>
+              <a:rPr lang="ko-KR" altLang="ko-KR" sz="1600" b="1"/>
+              <a:t>저장과 컴파일이 분리</a:t>
+            </a:r>
+            <a:r>
+              <a:rPr lang="ko-KR" altLang="ko-KR" sz="1600"/>
+              <a:t>돼 있다는 점입니다.</a:t>
+            </a:r>
+          </a:p>
+          <a:p>
+            <a:r>
+              <a:rPr lang="ko-KR" altLang="ko-KR" sz="1600" b="1"/>
+              <a:t>① </a:t>
+            </a:r>
+            <a:r>
+              <a:rPr lang="ko-KR" altLang="ko-KR" sz="1600"/>
+              <a:t>save</a:t>
+            </a:r>
+            <a:r>
+              <a:rPr lang="ko-KR" altLang="ko-KR" sz="1600" b="1"/>
+              <a:t> — 원자료를 inbox에 넣기</a:t>
+            </a:r>
+            <a:endParaRPr lang="ko-KR" altLang="ko-KR" sz="1600"/>
+          </a:p>
+          <a:p>
+            <a:r>
+              <a:rPr lang="ko-KR" altLang="ko-KR" sz="1600"/>
+              <a:t>"이거 knot에 저장해줘"   /   "vault에 넣어줘"</a:t>
+            </a:r>
+          </a:p>
+          <a:p>
+            <a:r>
+              <a:rPr lang="ko-KR" altLang="ko-KR" sz="1600"/>
+              <a:t>자료를 inbox/에 슬러그 파일로 저장하고 </a:t>
+            </a:r>
+            <a:r>
+              <a:rPr lang="ko-KR" altLang="ko-KR" sz="1600" b="1"/>
+              <a:t>그 파일만 커밋</a:t>
+            </a:r>
+            <a:r>
+              <a:rPr lang="ko-KR" altLang="ko-KR" sz="1600"/>
+              <a:t>합니다. 여기서 끝 — 아직 wiki에 반영되지 않습니다.</a:t>
+            </a:r>
+          </a:p>
+          <a:p>
+            <a:r>
+              <a:rPr lang="ko-KR" altLang="ko-KR" sz="1600" b="1"/>
+              <a:t>② </a:t>
+            </a:r>
+            <a:r>
+              <a:rPr lang="ko-KR" altLang="ko-KR" sz="1600"/>
+              <a:t>ingest</a:t>
+            </a:r>
+            <a:r>
+              <a:rPr lang="ko-KR" altLang="ko-KR" sz="1600" b="1"/>
+              <a:t> — inbox를 wiki로 컴파일</a:t>
+            </a:r>
+            <a:endParaRPr lang="ko-KR" altLang="ko-KR" sz="1600"/>
+          </a:p>
+          <a:p>
+            <a:r>
+              <a:rPr lang="ko-KR" altLang="ko-KR" sz="1600"/>
+              <a:t>"knot ingest"   /   "지식그물 컴파일해줘"</a:t>
+            </a:r>
+          </a:p>
+          <a:p>
+            <a:r>
+              <a:rPr lang="ko-KR" altLang="ko-KR" sz="1600"/>
+              <a:t>prompts/ingest.md 규약대로 source/entity/concept 페이지를 만들고 [[교차링크]]·index.md·log.md를 갱신한 뒤, 원본을 raw/YYYY-MM-DD-*로 옮기고 lint→커밋합니다.</a:t>
+            </a:r>
+          </a:p>
+          <a:p>
+            <a:r>
+              <a:rPr lang="ko-KR" altLang="ko-KR" sz="1600"/>
+              <a:t>왜 나누나 — save가 커밋까지 하는 이유는 ingest 1단계의 </a:t>
+            </a:r>
+            <a:r>
+              <a:rPr lang="ko-KR" altLang="ko-KR" sz="1600" b="1"/>
+              <a:t>클린트리 가드</a:t>
+            </a:r>
+            <a:r>
+              <a:rPr lang="ko-KR" altLang="ko-KR" sz="1600"/>
+              <a:t>(더러우면 중단) 때문입니다. 커밋해두지 않으면 다음 ingest가 막힙니다.</a:t>
+            </a:r>
+          </a:p>
+          <a:p>
+            <a:r>
+              <a:rPr lang="ko-KR" altLang="ko-KR" sz="1600" b="1"/>
+              <a:t>나머지 2개</a:t>
+            </a:r>
+            <a:endParaRPr lang="ko-KR" altLang="ko-KR" sz="1600"/>
+          </a:p>
+          <a:p>
+            <a:pPr lvl="0"/>
+            <a:r>
+              <a:rPr lang="ko-KR" altLang="ko-KR" sz="1600"/>
+              <a:t>query — "knot에 물어봐". 근거기반 응답이고, vault에 근거가 없으면 **지어내지 않고 "근거 없음"**이라고 답합니다</a:t>
+            </a:r>
+          </a:p>
+          <a:p>
+            <a:pPr lvl="0"/>
+            <a:r>
+              <a:rPr lang="ko-KR" altLang="ko-KR" sz="1600"/>
+              <a:t>lint — "vault 건강검진". scripts/lint.py(기계) + prompts/lint.md(의미 진찰: 모순·stale·고아)</a:t>
+            </a:r>
+          </a:p>
+          <a:p>
+            <a:r>
+              <a:rPr lang="ko-KR" altLang="ko-KR" sz="1600"/>
+              <a:t>무인 운용(scripts/drain.sh를 스케줄러에 등록)도 있지만 </a:t>
+            </a:r>
+            <a:r>
+              <a:rPr lang="ko-KR" altLang="ko-KR" sz="1600" b="1"/>
+              <a:t>기본 OFF</a:t>
+            </a:r>
+            <a:r>
+              <a:rPr lang="ko-KR" altLang="ko-KR" sz="1600"/>
+              <a:t>이고 물어본 뒤에만 등록합니다</a:t>
+            </a:r>
+          </a:p>
+          <a:p>
+            <a:endParaRPr lang="ko-KR" altLang="en-US" sz="1600"/>
           </a:p>
         </p:txBody>
       </p:sp>
